--- a/STATISTICS.pptx
+++ b/STATISTICS.pptx
@@ -2,7 +2,7 @@
 <file path=ppt/presentation.xml><?xml version="1.0" encoding="utf-8"?>
 <p:presentation xmlns:a="http://schemas.openxmlformats.org/drawingml/2006/main" xmlns:r="http://schemas.openxmlformats.org/officeDocument/2006/relationships" xmlns:p="http://schemas.openxmlformats.org/presentationml/2006/main" saveSubsetFonts="1">
   <p:sldMasterIdLst>
-    <p:sldMasterId id="2147483678" r:id="rId1"/>
+    <p:sldMasterId id="2147483771" r:id="rId1"/>
   </p:sldMasterIdLst>
   <p:notesMasterIdLst>
     <p:notesMasterId r:id="rId11"/>
@@ -3372,7 +3372,7 @@
           <a:p>
             <a:fld id="{BDE01A47-9CDC-44D5-B755-AB9B9BDB12DF}" type="datetimeFigureOut">
               <a:rPr lang="en-GB" smtClean="0"/>
-              <a:t>12/01/2026</a:t>
+              <a:t>16/03/2026</a:t>
             </a:fld>
             <a:endParaRPr lang="en-GB"/>
           </a:p>
@@ -4446,7 +4446,7 @@
           <a:p>
             <a:fld id="{15ED27C5-C8E7-47ED-AC0C-76DDA779947E}" type="datetimeFigureOut">
               <a:rPr lang="en-GB" smtClean="0"/>
-              <a:t>12/01/2026</a:t>
+              <a:t>16/03/2026</a:t>
             </a:fld>
             <a:endParaRPr lang="en-GB"/>
           </a:p>
@@ -4497,7 +4497,7 @@
     </p:spTree>
     <p:extLst>
       <p:ext uri="{BB962C8B-B14F-4D97-AF65-F5344CB8AC3E}">
-        <p14:creationId xmlns:p14="http://schemas.microsoft.com/office/powerpoint/2010/main" val="4117594876"/>
+        <p14:creationId xmlns:p14="http://schemas.microsoft.com/office/powerpoint/2010/main" val="1273013353"/>
       </p:ext>
     </p:extLst>
   </p:cSld>
@@ -4697,7 +4697,7 @@
           <a:p>
             <a:fld id="{15ED27C5-C8E7-47ED-AC0C-76DDA779947E}" type="datetimeFigureOut">
               <a:rPr lang="en-GB" smtClean="0"/>
-              <a:t>12/01/2026</a:t>
+              <a:t>16/03/2026</a:t>
             </a:fld>
             <a:endParaRPr lang="en-GB"/>
           </a:p>
@@ -4748,7 +4748,7 @@
     </p:spTree>
     <p:extLst>
       <p:ext uri="{BB962C8B-B14F-4D97-AF65-F5344CB8AC3E}">
-        <p14:creationId xmlns:p14="http://schemas.microsoft.com/office/powerpoint/2010/main" val="3722159908"/>
+        <p14:creationId xmlns:p14="http://schemas.microsoft.com/office/powerpoint/2010/main" val="777057203"/>
       </p:ext>
     </p:extLst>
   </p:cSld>
@@ -5011,7 +5011,7 @@
           <a:p>
             <a:fld id="{15ED27C5-C8E7-47ED-AC0C-76DDA779947E}" type="datetimeFigureOut">
               <a:rPr lang="en-GB" smtClean="0"/>
-              <a:t>12/01/2026</a:t>
+              <a:t>16/03/2026</a:t>
             </a:fld>
             <a:endParaRPr lang="en-GB"/>
           </a:p>
@@ -5152,7 +5152,7 @@
     </p:spTree>
     <p:extLst>
       <p:ext uri="{BB962C8B-B14F-4D97-AF65-F5344CB8AC3E}">
-        <p14:creationId xmlns:p14="http://schemas.microsoft.com/office/powerpoint/2010/main" val="4173604047"/>
+        <p14:creationId xmlns:p14="http://schemas.microsoft.com/office/powerpoint/2010/main" val="4220270566"/>
       </p:ext>
     </p:extLst>
   </p:cSld>
@@ -5352,7 +5352,7 @@
           <a:p>
             <a:fld id="{15ED27C5-C8E7-47ED-AC0C-76DDA779947E}" type="datetimeFigureOut">
               <a:rPr lang="en-GB" smtClean="0"/>
-              <a:t>12/01/2026</a:t>
+              <a:t>16/03/2026</a:t>
             </a:fld>
             <a:endParaRPr lang="en-GB"/>
           </a:p>
@@ -5403,7 +5403,7 @@
     </p:spTree>
     <p:extLst>
       <p:ext uri="{BB962C8B-B14F-4D97-AF65-F5344CB8AC3E}">
-        <p14:creationId xmlns:p14="http://schemas.microsoft.com/office/powerpoint/2010/main" val="2035188888"/>
+        <p14:creationId xmlns:p14="http://schemas.microsoft.com/office/powerpoint/2010/main" val="1512596077"/>
       </p:ext>
     </p:extLst>
   </p:cSld>
@@ -5666,7 +5666,7 @@
           <a:p>
             <a:fld id="{15ED27C5-C8E7-47ED-AC0C-76DDA779947E}" type="datetimeFigureOut">
               <a:rPr lang="en-GB" smtClean="0"/>
-              <a:t>12/01/2026</a:t>
+              <a:t>16/03/2026</a:t>
             </a:fld>
             <a:endParaRPr lang="en-GB"/>
           </a:p>
@@ -5799,7 +5799,7 @@
     </p:spTree>
     <p:extLst>
       <p:ext uri="{BB962C8B-B14F-4D97-AF65-F5344CB8AC3E}">
-        <p14:creationId xmlns:p14="http://schemas.microsoft.com/office/powerpoint/2010/main" val="1068151938"/>
+        <p14:creationId xmlns:p14="http://schemas.microsoft.com/office/powerpoint/2010/main" val="3774244634"/>
       </p:ext>
     </p:extLst>
   </p:cSld>
@@ -6059,7 +6059,7 @@
           <a:p>
             <a:fld id="{15ED27C5-C8E7-47ED-AC0C-76DDA779947E}" type="datetimeFigureOut">
               <a:rPr lang="en-GB" smtClean="0"/>
-              <a:t>12/01/2026</a:t>
+              <a:t>16/03/2026</a:t>
             </a:fld>
             <a:endParaRPr lang="en-GB"/>
           </a:p>
@@ -6110,7 +6110,7 @@
     </p:spTree>
     <p:extLst>
       <p:ext uri="{BB962C8B-B14F-4D97-AF65-F5344CB8AC3E}">
-        <p14:creationId xmlns:p14="http://schemas.microsoft.com/office/powerpoint/2010/main" val="1422935999"/>
+        <p14:creationId xmlns:p14="http://schemas.microsoft.com/office/powerpoint/2010/main" val="213601355"/>
       </p:ext>
     </p:extLst>
   </p:cSld>
@@ -6229,7 +6229,7 @@
           <a:p>
             <a:fld id="{15ED27C5-C8E7-47ED-AC0C-76DDA779947E}" type="datetimeFigureOut">
               <a:rPr lang="en-GB" smtClean="0"/>
-              <a:t>12/01/2026</a:t>
+              <a:t>16/03/2026</a:t>
             </a:fld>
             <a:endParaRPr lang="en-GB"/>
           </a:p>
@@ -6280,7 +6280,7 @@
     </p:spTree>
     <p:extLst>
       <p:ext uri="{BB962C8B-B14F-4D97-AF65-F5344CB8AC3E}">
-        <p14:creationId xmlns:p14="http://schemas.microsoft.com/office/powerpoint/2010/main" val="189139858"/>
+        <p14:creationId xmlns:p14="http://schemas.microsoft.com/office/powerpoint/2010/main" val="1086612674"/>
       </p:ext>
     </p:extLst>
   </p:cSld>
@@ -6409,7 +6409,7 @@
           <a:p>
             <a:fld id="{15ED27C5-C8E7-47ED-AC0C-76DDA779947E}" type="datetimeFigureOut">
               <a:rPr lang="en-GB" smtClean="0"/>
-              <a:t>12/01/2026</a:t>
+              <a:t>16/03/2026</a:t>
             </a:fld>
             <a:endParaRPr lang="en-GB"/>
           </a:p>
@@ -6460,7 +6460,7 @@
     </p:spTree>
     <p:extLst>
       <p:ext uri="{BB962C8B-B14F-4D97-AF65-F5344CB8AC3E}">
-        <p14:creationId xmlns:p14="http://schemas.microsoft.com/office/powerpoint/2010/main" val="2337949082"/>
+        <p14:creationId xmlns:p14="http://schemas.microsoft.com/office/powerpoint/2010/main" val="3971628846"/>
       </p:ext>
     </p:extLst>
   </p:cSld>
@@ -6585,7 +6585,7 @@
           <a:p>
             <a:fld id="{15ED27C5-C8E7-47ED-AC0C-76DDA779947E}" type="datetimeFigureOut">
               <a:rPr lang="en-GB" smtClean="0"/>
-              <a:t>12/01/2026</a:t>
+              <a:t>16/03/2026</a:t>
             </a:fld>
             <a:endParaRPr lang="en-GB"/>
           </a:p>
@@ -6636,7 +6636,7 @@
     </p:spTree>
     <p:extLst>
       <p:ext uri="{BB962C8B-B14F-4D97-AF65-F5344CB8AC3E}">
-        <p14:creationId xmlns:p14="http://schemas.microsoft.com/office/powerpoint/2010/main" val="2979155764"/>
+        <p14:creationId xmlns:p14="http://schemas.microsoft.com/office/powerpoint/2010/main" val="1333372232"/>
       </p:ext>
     </p:extLst>
   </p:cSld>
@@ -6832,7 +6832,7 @@
           <a:p>
             <a:fld id="{15ED27C5-C8E7-47ED-AC0C-76DDA779947E}" type="datetimeFigureOut">
               <a:rPr lang="en-GB" smtClean="0"/>
-              <a:t>12/01/2026</a:t>
+              <a:t>16/03/2026</a:t>
             </a:fld>
             <a:endParaRPr lang="en-GB"/>
           </a:p>
@@ -6883,7 +6883,7 @@
     </p:spTree>
     <p:extLst>
       <p:ext uri="{BB962C8B-B14F-4D97-AF65-F5344CB8AC3E}">
-        <p14:creationId xmlns:p14="http://schemas.microsoft.com/office/powerpoint/2010/main" val="1014998233"/>
+        <p14:creationId xmlns:p14="http://schemas.microsoft.com/office/powerpoint/2010/main" val="560641972"/>
       </p:ext>
     </p:extLst>
   </p:cSld>
@@ -7064,7 +7064,7 @@
           <a:p>
             <a:fld id="{15ED27C5-C8E7-47ED-AC0C-76DDA779947E}" type="datetimeFigureOut">
               <a:rPr lang="en-GB" smtClean="0"/>
-              <a:t>12/01/2026</a:t>
+              <a:t>16/03/2026</a:t>
             </a:fld>
             <a:endParaRPr lang="en-GB"/>
           </a:p>
@@ -7115,7 +7115,7 @@
     </p:spTree>
     <p:extLst>
       <p:ext uri="{BB962C8B-B14F-4D97-AF65-F5344CB8AC3E}">
-        <p14:creationId xmlns:p14="http://schemas.microsoft.com/office/powerpoint/2010/main" val="2785511781"/>
+        <p14:creationId xmlns:p14="http://schemas.microsoft.com/office/powerpoint/2010/main" val="3712008823"/>
       </p:ext>
     </p:extLst>
   </p:cSld>
@@ -7438,7 +7438,7 @@
           <a:p>
             <a:fld id="{15ED27C5-C8E7-47ED-AC0C-76DDA779947E}" type="datetimeFigureOut">
               <a:rPr lang="en-GB" smtClean="0"/>
-              <a:t>12/01/2026</a:t>
+              <a:t>16/03/2026</a:t>
             </a:fld>
             <a:endParaRPr lang="en-GB"/>
           </a:p>
@@ -7489,7 +7489,7 @@
     </p:spTree>
     <p:extLst>
       <p:ext uri="{BB962C8B-B14F-4D97-AF65-F5344CB8AC3E}">
-        <p14:creationId xmlns:p14="http://schemas.microsoft.com/office/powerpoint/2010/main" val="3303433735"/>
+        <p14:creationId xmlns:p14="http://schemas.microsoft.com/office/powerpoint/2010/main" val="811520458"/>
       </p:ext>
     </p:extLst>
   </p:cSld>
@@ -7561,7 +7561,7 @@
           <a:p>
             <a:fld id="{15ED27C5-C8E7-47ED-AC0C-76DDA779947E}" type="datetimeFigureOut">
               <a:rPr lang="en-GB" smtClean="0"/>
-              <a:t>12/01/2026</a:t>
+              <a:t>16/03/2026</a:t>
             </a:fld>
             <a:endParaRPr lang="en-GB"/>
           </a:p>
@@ -7612,7 +7612,7 @@
     </p:spTree>
     <p:extLst>
       <p:ext uri="{BB962C8B-B14F-4D97-AF65-F5344CB8AC3E}">
-        <p14:creationId xmlns:p14="http://schemas.microsoft.com/office/powerpoint/2010/main" val="2574314181"/>
+        <p14:creationId xmlns:p14="http://schemas.microsoft.com/office/powerpoint/2010/main" val="2028154786"/>
       </p:ext>
     </p:extLst>
   </p:cSld>
@@ -7656,7 +7656,7 @@
           <a:p>
             <a:fld id="{15ED27C5-C8E7-47ED-AC0C-76DDA779947E}" type="datetimeFigureOut">
               <a:rPr lang="en-GB" smtClean="0"/>
-              <a:t>12/01/2026</a:t>
+              <a:t>16/03/2026</a:t>
             </a:fld>
             <a:endParaRPr lang="en-GB"/>
           </a:p>
@@ -7707,7 +7707,7 @@
     </p:spTree>
     <p:extLst>
       <p:ext uri="{BB962C8B-B14F-4D97-AF65-F5344CB8AC3E}">
-        <p14:creationId xmlns:p14="http://schemas.microsoft.com/office/powerpoint/2010/main" val="1017582006"/>
+        <p14:creationId xmlns:p14="http://schemas.microsoft.com/office/powerpoint/2010/main" val="519807566"/>
       </p:ext>
     </p:extLst>
   </p:cSld>
@@ -7911,7 +7911,7 @@
           <a:p>
             <a:fld id="{15ED27C5-C8E7-47ED-AC0C-76DDA779947E}" type="datetimeFigureOut">
               <a:rPr lang="en-GB" smtClean="0"/>
-              <a:t>12/01/2026</a:t>
+              <a:t>16/03/2026</a:t>
             </a:fld>
             <a:endParaRPr lang="en-GB"/>
           </a:p>
@@ -7962,7 +7962,7 @@
     </p:spTree>
     <p:extLst>
       <p:ext uri="{BB962C8B-B14F-4D97-AF65-F5344CB8AC3E}">
-        <p14:creationId xmlns:p14="http://schemas.microsoft.com/office/powerpoint/2010/main" val="874936925"/>
+        <p14:creationId xmlns:p14="http://schemas.microsoft.com/office/powerpoint/2010/main" val="3662575767"/>
       </p:ext>
     </p:extLst>
   </p:cSld>
@@ -8174,7 +8174,7 @@
           <a:p>
             <a:fld id="{15ED27C5-C8E7-47ED-AC0C-76DDA779947E}" type="datetimeFigureOut">
               <a:rPr lang="en-GB" smtClean="0"/>
-              <a:t>12/01/2026</a:t>
+              <a:t>16/03/2026</a:t>
             </a:fld>
             <a:endParaRPr lang="en-GB"/>
           </a:p>
@@ -8225,7 +8225,7 @@
     </p:spTree>
     <p:extLst>
       <p:ext uri="{BB962C8B-B14F-4D97-AF65-F5344CB8AC3E}">
-        <p14:creationId xmlns:p14="http://schemas.microsoft.com/office/powerpoint/2010/main" val="2953306983"/>
+        <p14:creationId xmlns:p14="http://schemas.microsoft.com/office/powerpoint/2010/main" val="3374010584"/>
       </p:ext>
     </p:extLst>
   </p:cSld>
@@ -8917,7 +8917,7 @@
           <a:p>
             <a:fld id="{15ED27C5-C8E7-47ED-AC0C-76DDA779947E}" type="datetimeFigureOut">
               <a:rPr lang="en-GB" smtClean="0"/>
-              <a:t>12/01/2026</a:t>
+              <a:t>16/03/2026</a:t>
             </a:fld>
             <a:endParaRPr lang="en-GB"/>
           </a:p>
@@ -9002,28 +9002,28 @@
     </p:spTree>
     <p:extLst>
       <p:ext uri="{BB962C8B-B14F-4D97-AF65-F5344CB8AC3E}">
-        <p14:creationId xmlns:p14="http://schemas.microsoft.com/office/powerpoint/2010/main" val="2096608680"/>
+        <p14:creationId xmlns:p14="http://schemas.microsoft.com/office/powerpoint/2010/main" val="3417237380"/>
       </p:ext>
     </p:extLst>
   </p:cSld>
   <p:clrMap bg1="lt1" tx1="dk1" bg2="lt2" tx2="dk2" accent1="accent1" accent2="accent2" accent3="accent3" accent4="accent4" accent5="accent5" accent6="accent6" hlink="hlink" folHlink="folHlink"/>
   <p:sldLayoutIdLst>
-    <p:sldLayoutId id="2147483679" r:id="rId1"/>
-    <p:sldLayoutId id="2147483680" r:id="rId2"/>
-    <p:sldLayoutId id="2147483681" r:id="rId3"/>
-    <p:sldLayoutId id="2147483682" r:id="rId4"/>
-    <p:sldLayoutId id="2147483683" r:id="rId5"/>
-    <p:sldLayoutId id="2147483684" r:id="rId6"/>
-    <p:sldLayoutId id="2147483685" r:id="rId7"/>
-    <p:sldLayoutId id="2147483686" r:id="rId8"/>
-    <p:sldLayoutId id="2147483687" r:id="rId9"/>
-    <p:sldLayoutId id="2147483688" r:id="rId10"/>
-    <p:sldLayoutId id="2147483689" r:id="rId11"/>
-    <p:sldLayoutId id="2147483690" r:id="rId12"/>
-    <p:sldLayoutId id="2147483691" r:id="rId13"/>
-    <p:sldLayoutId id="2147483692" r:id="rId14"/>
-    <p:sldLayoutId id="2147483693" r:id="rId15"/>
-    <p:sldLayoutId id="2147483694" r:id="rId16"/>
+    <p:sldLayoutId id="2147483772" r:id="rId1"/>
+    <p:sldLayoutId id="2147483773" r:id="rId2"/>
+    <p:sldLayoutId id="2147483774" r:id="rId3"/>
+    <p:sldLayoutId id="2147483775" r:id="rId4"/>
+    <p:sldLayoutId id="2147483776" r:id="rId5"/>
+    <p:sldLayoutId id="2147483777" r:id="rId6"/>
+    <p:sldLayoutId id="2147483778" r:id="rId7"/>
+    <p:sldLayoutId id="2147483779" r:id="rId8"/>
+    <p:sldLayoutId id="2147483780" r:id="rId9"/>
+    <p:sldLayoutId id="2147483781" r:id="rId10"/>
+    <p:sldLayoutId id="2147483782" r:id="rId11"/>
+    <p:sldLayoutId id="2147483783" r:id="rId12"/>
+    <p:sldLayoutId id="2147483784" r:id="rId13"/>
+    <p:sldLayoutId id="2147483785" r:id="rId14"/>
+    <p:sldLayoutId id="2147483786" r:id="rId15"/>
+    <p:sldLayoutId id="2147483787" r:id="rId16"/>
   </p:sldLayoutIdLst>
   <p:txStyles>
     <p:titleStyle>
@@ -9459,13 +9459,13 @@
         </p:nvSpPr>
         <p:spPr>
           <a:xfrm>
-            <a:off x="1524000" y="1122362"/>
-            <a:ext cx="9144000" cy="3252689"/>
+            <a:off x="-1781908" y="2080260"/>
+            <a:ext cx="9144000" cy="1714500"/>
           </a:xfrm>
         </p:spPr>
         <p:txBody>
           <a:bodyPr>
-            <a:normAutofit/>
+            <a:normAutofit fontScale="90000"/>
           </a:bodyPr>
           <a:lstStyle/>
           <a:p>
@@ -9476,6 +9476,42 @@
           </a:p>
         </p:txBody>
       </p:sp>
+      <p:pic>
+        <p:nvPicPr>
+          <p:cNvPr id="4" name="Picture 3">
+            <a:extLst>
+              <a:ext uri="{FF2B5EF4-FFF2-40B4-BE49-F238E27FC236}">
+                <a16:creationId xmlns:a16="http://schemas.microsoft.com/office/drawing/2014/main" id="{383A9ECC-F749-E1C0-3AFE-B1043752C376}"/>
+              </a:ext>
+            </a:extLst>
+          </p:cNvPr>
+          <p:cNvPicPr>
+            <a:picLocks noChangeAspect="1"/>
+          </p:cNvPicPr>
+          <p:nvPr/>
+        </p:nvPicPr>
+        <p:blipFill>
+          <a:blip r:embed="rId2">
+            <a:extLst>
+              <a:ext uri="{28A0092B-C50C-407E-A947-70E740481C1C}">
+                <a14:useLocalDpi xmlns:a14="http://schemas.microsoft.com/office/drawing/2010/main" val="0"/>
+              </a:ext>
+            </a:extLst>
+          </a:blip>
+          <a:stretch>
+            <a:fillRect/>
+          </a:stretch>
+        </p:blipFill>
+        <p:spPr>
+          <a:xfrm>
+            <a:off x="7724335" y="2080260"/>
+            <a:ext cx="2286000" cy="1714500"/>
+          </a:xfrm>
+          <a:prstGeom prst="rect">
+            <a:avLst/>
+          </a:prstGeom>
+        </p:spPr>
+      </p:pic>
     </p:spTree>
     <p:extLst>
       <p:ext uri="{BB962C8B-B14F-4D97-AF65-F5344CB8AC3E}">
@@ -9659,7 +9695,7 @@
         </p:blipFill>
         <p:spPr>
           <a:xfrm>
-            <a:off x="4994030" y="3429000"/>
+            <a:off x="4994030" y="3344592"/>
             <a:ext cx="5794131" cy="3215743"/>
           </a:xfrm>
           <a:prstGeom prst="rect">
@@ -11055,7 +11091,7 @@
         </p:blipFill>
         <p:spPr>
           <a:xfrm>
-            <a:off x="7379358" y="3812967"/>
+            <a:off x="7196475" y="3025173"/>
             <a:ext cx="4812642" cy="3018143"/>
           </a:xfrm>
           <a:prstGeom prst="rect">
@@ -11445,7 +11481,7 @@
         </p:blipFill>
         <p:spPr>
           <a:xfrm>
-            <a:off x="7202658" y="-230846"/>
+            <a:off x="6907230" y="-5760"/>
             <a:ext cx="5383235" cy="3127519"/>
           </a:xfrm>
           <a:prstGeom prst="rect">
@@ -11721,7 +11757,7 @@
         </p:spPr>
         <p:txBody>
           <a:bodyPr>
-            <a:normAutofit fontScale="92500" lnSpcReduction="10000"/>
+            <a:normAutofit/>
           </a:bodyPr>
           <a:lstStyle/>
           <a:p>
@@ -11729,7 +11765,7 @@
               <a:buNone/>
             </a:pPr>
             <a:r>
-              <a:rPr lang="en-GB" sz="2100" dirty="0"/>
+              <a:rPr lang="en-GB" dirty="0"/>
               <a:t>Qualitative data is used to describe qualities or characteristics of something. It provides answers in words instead of numbers.</a:t>
             </a:r>
           </a:p>
@@ -11737,15 +11773,9 @@
             <a:pPr marL="0" indent="0">
               <a:buNone/>
             </a:pPr>
-            <a:endParaRPr lang="en-GB" sz="2400" dirty="0"/>
-          </a:p>
-          <a:p>
-            <a:pPr marL="0" indent="0">
-              <a:buNone/>
-            </a:pPr>
             <a:r>
               <a:rPr lang="en-GB" sz="2600" b="1" dirty="0"/>
-              <a:t>Qualitative Data are of two types:</a:t>
+              <a:t>Types:</a:t>
             </a:r>
           </a:p>
           <a:p>
@@ -11797,10 +11827,6 @@
               <a:buFont typeface="Wingdings" panose="05000000000000000000" pitchFamily="2" charset="2"/>
               <a:buChar char="q"/>
             </a:pPr>
-            <a:r>
-              <a:rPr lang="en-GB" dirty="0"/>
-              <a:t> </a:t>
-            </a:r>
             <a:r>
               <a:rPr lang="en-GB" sz="2400" b="1" dirty="0"/>
               <a:t>Ordinal Data </a:t>
@@ -11940,7 +11966,7 @@
               <a:buNone/>
             </a:pPr>
             <a:r>
-              <a:rPr lang="en-GB" sz="2200" dirty="0"/>
+              <a:rPr lang="en-GB" sz="2000" dirty="0"/>
               <a:t>Quantitative data involves numbers. It can be counted, measured, and calculated.</a:t>
             </a:r>
           </a:p>
@@ -11948,7 +11974,7 @@
             <a:pPr marL="0" indent="0">
               <a:buNone/>
             </a:pPr>
-            <a:endParaRPr lang="en-GB" sz="2200" dirty="0"/>
+            <a:endParaRPr lang="en-GB" sz="1200" dirty="0"/>
           </a:p>
           <a:p>
             <a:pPr marL="0" indent="0">
@@ -11956,7 +11982,7 @@
             </a:pPr>
             <a:r>
               <a:rPr lang="en-GB" sz="3000" dirty="0"/>
-              <a:t>Quantitative Data are of two types:</a:t>
+              <a:t>Types:</a:t>
             </a:r>
           </a:p>
           <a:p>
